--- a/classes/parte-17-profundizacion-para-certificaciones/313-gestion-del-ciclo-de-vida-de-identidades-iam-empresarial/clase-313-presentacion.pptx
+++ b/classes/parte-17-profundizacion-para-certificaciones/313-gestion-del-ciclo-de-vida-de-identidades-iam-empresarial/clase-313-presentacion.pptx
@@ -17,6 +17,10 @@
     <p:sldId id="265" r:id="rId16"/>
     <p:sldId id="266" r:id="rId17"/>
     <p:sldId id="267" r:id="rId18"/>
+    <p:sldId id="268" r:id="rId19"/>
+    <p:sldId id="269" r:id="rId20"/>
+    <p:sldId id="270" r:id="rId21"/>
+    <p:sldId id="271" r:id="rId22"/>
   </p:sldIdLst>
   <p:sldSz cx="9144000" cy="6858000" type="screen4x3"/>
   <p:notesSz cx="6858000" cy="9144000"/>
@@ -3198,7 +3202,7 @@
                   <a:srgbClr val="0B3D2E"/>
                 </a:solidFill>
               </a:rPr>
-              <a:t>⚠️ Errores comunes</a:t>
+              <a:t>🧪 Laboratorio guiado — Diseñar el ciclo de vida y una matriz RBAC</a:t>
             </a:r>
           </a:p>
         </p:txBody>
@@ -3236,82 +3240,97 @@
                   <a:srgbClr val="22282E"/>
                 </a:solidFill>
               </a:rPr>
-              <a:t>•  La cuenta del exempleado sigue activa semanas después — Leaver no automatizado. Conecta RR. HH. como fuente y deshabilita el día de la baja.</a:t>
-            </a:r>
-          </a:p>
-          <a:p>
-            <a:pPr>
-              <a:spcAft>
-                <a:spcPts val="600"/>
-              </a:spcAft>
-            </a:pPr>
-            <a:r>
-              <a:rPr sz="1500">
-                <a:solidFill>
-                  <a:srgbClr val="22282E"/>
-                </a:solidFill>
-              </a:rPr>
-              <a:t>•  Usuarios con permisos de tres puestos anteriores — Privilege creep: Mover suma pero no resta. Retira los roles previos y recertifica.</a:t>
-            </a:r>
-          </a:p>
-          <a:p>
-            <a:pPr>
-              <a:spcAft>
-                <a:spcPts val="600"/>
-              </a:spcAft>
-            </a:pPr>
-            <a:r>
-              <a:rPr sz="1500">
-                <a:solidFill>
-                  <a:srgbClr val="22282E"/>
-                </a:solidFill>
-              </a:rPr>
-              <a:t>•  Todo el mundo es administrador "por comodidad" — Se viola mínimo privilegio. Rediseña roles y separa lo privilegiado.</a:t>
-            </a:r>
-          </a:p>
-          <a:p>
-            <a:pPr>
-              <a:spcAft>
-                <a:spcPts val="600"/>
-              </a:spcAft>
-            </a:pPr>
-            <a:r>
-              <a:rPr sz="1500">
-                <a:solidFill>
-                  <a:srgbClr val="22282E"/>
-                </a:solidFill>
-              </a:rPr>
-              <a:t>•  Cuentas de servicio sin dueño ni rotación — Quedan fuera del ciclo. Asigna propietario, rota credenciales e inclúyelas en revisiones.</a:t>
-            </a:r>
-          </a:p>
-          <a:p>
-            <a:pPr>
-              <a:spcAft>
-                <a:spcPts val="600"/>
-              </a:spcAft>
-            </a:pPr>
-            <a:r>
-              <a:rPr sz="1500">
-                <a:solidFill>
-                  <a:srgbClr val="22282E"/>
-                </a:solidFill>
-              </a:rPr>
-              <a:t>•  Recertificación que todos aprueban sin mirar — Rubber-stamping. Muestra el uso real del acceso y revoca por defecto si no hay respuesta.</a:t>
-            </a:r>
-          </a:p>
-          <a:p>
-            <a:pPr>
-              <a:spcAft>
-                <a:spcPts val="600"/>
-              </a:spcAft>
-            </a:pPr>
-            <a:r>
-              <a:rPr sz="1500">
-                <a:solidFill>
-                  <a:srgbClr val="22282E"/>
-                </a:solidFill>
-              </a:rPr>
-              <a:t>•  Cuentas compartidas de equipo — Rompen la accountability. Sustituye por cuentas individuales con roles.</a:t>
+              <a:t>•  Sobre la empresa "NovaSalud" de clases anteriores.</a:t>
+            </a:r>
+          </a:p>
+          <a:p>
+            <a:pPr>
+              <a:spcAft>
+                <a:spcPts val="600"/>
+              </a:spcAft>
+            </a:pPr>
+            <a:r>
+              <a:rPr sz="1500">
+                <a:solidFill>
+                  <a:srgbClr val="22282E"/>
+                </a:solidFill>
+              </a:rPr>
+              <a:t>•  Fuente autoritativa. Declara a RR. HH. como origen de verdad de la identidad: alta, cambio</a:t>
+            </a:r>
+          </a:p>
+          <a:p>
+            <a:pPr>
+              <a:spcAft>
+                <a:spcPts val="600"/>
+              </a:spcAft>
+            </a:pPr>
+            <a:r>
+              <a:rPr sz="1500">
+                <a:solidFill>
+                  <a:srgbClr val="22282E"/>
+                </a:solidFill>
+              </a:rPr>
+              <a:t>•  y baja se originan allí y se propagan a los sistemas (idealmente vía SCIM).</a:t>
+            </a:r>
+          </a:p>
+          <a:p>
+            <a:pPr>
+              <a:spcAft>
+                <a:spcPts val="600"/>
+              </a:spcAft>
+            </a:pPr>
+            <a:r>
+              <a:rPr sz="1500">
+                <a:solidFill>
+                  <a:srgbClr val="22282E"/>
+                </a:solidFill>
+              </a:rPr>
+              <a:t>•  Flujo Joiner. Diagrama el alta: RR. HH. crea el registro → se genera la cuenta → se asignan</a:t>
+            </a:r>
+          </a:p>
+          <a:p>
+            <a:pPr>
+              <a:spcAft>
+                <a:spcPts val="600"/>
+              </a:spcAft>
+            </a:pPr>
+            <a:r>
+              <a:rPr sz="1500">
+                <a:solidFill>
+                  <a:srgbClr val="22282E"/>
+                </a:solidFill>
+              </a:rPr>
+              <a:t>•  roles por puesto → se habilita MFA → se notifica al usuario. Define el SLA (p. ej. listo el día 1).</a:t>
+            </a:r>
+          </a:p>
+          <a:p>
+            <a:pPr>
+              <a:spcAft>
+                <a:spcPts val="600"/>
+              </a:spcAft>
+            </a:pPr>
+            <a:r>
+              <a:rPr sz="1500">
+                <a:solidFill>
+                  <a:srgbClr val="22282E"/>
+                </a:solidFill>
+              </a:rPr>
+              <a:t>•  Flujo Mover. Diseña el cambio de rol: al cambiar de puesto se retiran los permisos del</a:t>
+            </a:r>
+          </a:p>
+          <a:p>
+            <a:pPr>
+              <a:spcAft>
+                <a:spcPts val="600"/>
+              </a:spcAft>
+            </a:pPr>
+            <a:r>
+              <a:rPr sz="1500">
+                <a:solidFill>
+                  <a:srgbClr val="22282E"/>
+                </a:solidFill>
+              </a:rPr>
+              <a:t>•  rol anterior y se asignan los del nuevo. Evita el patrón "sumar sin restar" (privilege creep).</a:t>
             </a:r>
           </a:p>
         </p:txBody>
@@ -3362,7 +3381,7 @@
                   <a:srgbClr val="0B3D2E"/>
                 </a:solidFill>
               </a:rPr>
-              <a:t>❓ Preguntas frecuentes</a:t>
+              <a:t>✍️ Ejercicios</a:t>
             </a:r>
           </a:p>
         </p:txBody>
@@ -3400,97 +3419,82 @@
                   <a:srgbClr val="22282E"/>
                 </a:solidFill>
               </a:rPr>
-              <a:t>•  ❓ ¿RBAC o ABAC?</a:t>
-            </a:r>
-          </a:p>
-          <a:p>
-            <a:pPr>
-              <a:spcAft>
-                <a:spcPts val="600"/>
-              </a:spcAft>
-            </a:pPr>
-            <a:r>
-              <a:rPr sz="1500">
-                <a:solidFill>
-                  <a:srgbClr val="22282E"/>
-                </a:solidFill>
-              </a:rPr>
-              <a:t>•  No es excluyente. RBAC es simple, auditable y escala para la mayoría de casos; ABAC añade</a:t>
-            </a:r>
-          </a:p>
-          <a:p>
-            <a:pPr>
-              <a:spcAft>
-                <a:spcPts val="600"/>
-              </a:spcAft>
-            </a:pPr>
-            <a:r>
-              <a:rPr sz="1500">
-                <a:solidFill>
-                  <a:srgbClr val="22282E"/>
-                </a:solidFill>
-              </a:rPr>
-              <a:t>•  granularidad y contexto (hora, ubicación, sensibilidad). Muchas organizaciones combinan roles</a:t>
-            </a:r>
-          </a:p>
-          <a:p>
-            <a:pPr>
-              <a:spcAft>
-                <a:spcPts val="600"/>
-              </a:spcAft>
-            </a:pPr>
-            <a:r>
-              <a:rPr sz="1500">
-                <a:solidFill>
-                  <a:srgbClr val="22282E"/>
-                </a:solidFill>
-              </a:rPr>
-              <a:t>•  como base y atributos para políticas finas.</a:t>
-            </a:r>
-          </a:p>
-          <a:p>
-            <a:pPr>
-              <a:spcAft>
-                <a:spcPts val="600"/>
-              </a:spcAft>
-            </a:pPr>
-            <a:r>
-              <a:rPr sz="1500">
-                <a:solidFill>
-                  <a:srgbClr val="22282E"/>
-                </a:solidFill>
-              </a:rPr>
-              <a:t>•  ❓ ¿Por qué deshabilitar y no borrar la cuenta al dar de baja?</a:t>
-            </a:r>
-          </a:p>
-          <a:p>
-            <a:pPr>
-              <a:spcAft>
-                <a:spcPts val="600"/>
-              </a:spcAft>
-            </a:pPr>
-            <a:r>
-              <a:rPr sz="1500">
-                <a:solidFill>
-                  <a:srgbClr val="22282E"/>
-                </a:solidFill>
-              </a:rPr>
-              <a:t>•  Para preservar la trazabilidad, cumplir retención de logs y permitir investigaciones. Se borra</a:t>
-            </a:r>
-          </a:p>
-          <a:p>
-            <a:pPr>
-              <a:spcAft>
-                <a:spcPts val="600"/>
-              </a:spcAft>
-            </a:pPr>
-            <a:r>
-              <a:rPr sz="1500">
-                <a:solidFill>
-                  <a:srgbClr val="22282E"/>
-                </a:solidFill>
-              </a:rPr>
-              <a:t>•  después, según la política de retención, tras transferir la propiedad de datos.</a:t>
+              <a:t>•  Dibuja el ciclo de vida completo de la identidad con los disparadores de cada transición.</a:t>
+            </a:r>
+          </a:p>
+          <a:p>
+            <a:pPr>
+              <a:spcAft>
+                <a:spcPts val="600"/>
+              </a:spcAft>
+            </a:pPr>
+            <a:r>
+              <a:rPr sz="1500">
+                <a:solidFill>
+                  <a:srgbClr val="22282E"/>
+                </a:solidFill>
+              </a:rPr>
+              <a:t>•  Explica con un ejemplo la diferencia entre autenticación y autorización.</a:t>
+            </a:r>
+          </a:p>
+          <a:p>
+            <a:pPr>
+              <a:spcAft>
+                <a:spcPts val="600"/>
+              </a:spcAft>
+            </a:pPr>
+            <a:r>
+              <a:rPr sz="1500">
+                <a:solidFill>
+                  <a:srgbClr val="22282E"/>
+                </a:solidFill>
+              </a:rPr>
+              <a:t>•  Convierte una lista de accesos individuales desordenados en un modelo RBAC de 4 roles.</a:t>
+            </a:r>
+          </a:p>
+          <a:p>
+            <a:pPr>
+              <a:spcAft>
+                <a:spcPts val="600"/>
+              </a:spcAft>
+            </a:pPr>
+            <a:r>
+              <a:rPr sz="1500">
+                <a:solidFill>
+                  <a:srgbClr val="22282E"/>
+                </a:solidFill>
+              </a:rPr>
+              <a:t>•  Define 3 reglas de separación de funciones para un proceso de compras.</a:t>
+            </a:r>
+          </a:p>
+          <a:p>
+            <a:pPr>
+              <a:spcAft>
+                <a:spcPts val="600"/>
+              </a:spcAft>
+            </a:pPr>
+            <a:r>
+              <a:rPr sz="1500">
+                <a:solidFill>
+                  <a:srgbClr val="22282E"/>
+                </a:solidFill>
+              </a:rPr>
+              <a:t>•  Diseña el flujo Leaver para un despido inmediato: ¿qué se hace en los primeros 15 minutos?</a:t>
+            </a:r>
+          </a:p>
+          <a:p>
+            <a:pPr>
+              <a:spcAft>
+                <a:spcPts val="600"/>
+              </a:spcAft>
+            </a:pPr>
+            <a:r>
+              <a:rPr sz="1500">
+                <a:solidFill>
+                  <a:srgbClr val="22282E"/>
+                </a:solidFill>
+              </a:rPr>
+              <a:t>•  Propón una regla ABAC que RBAC no pueda expresar bien (p. ej. acceso solo en horario laboral y desde red corporativa).</a:t>
             </a:r>
           </a:p>
         </p:txBody>
@@ -3541,7 +3545,7 @@
                   <a:srgbClr val="0B3D2E"/>
                 </a:solidFill>
               </a:rPr>
-              <a:t>🔗 Referencias</a:t>
+              <a:t>📝 Reto verificable</a:t>
             </a:r>
           </a:p>
         </p:txBody>
@@ -3579,6 +3583,513 @@
                   <a:srgbClr val="22282E"/>
                 </a:solidFill>
               </a:rPr>
+              <a:t>•  Entrega un Manual de Gestión del Ciclo de Vida de Identidades que contenga: los tres flujos</a:t>
+            </a:r>
+          </a:p>
+          <a:p>
+            <a:pPr>
+              <a:spcAft>
+                <a:spcPts val="600"/>
+              </a:spcAft>
+            </a:pPr>
+            <a:r>
+              <a:rPr sz="1500">
+                <a:solidFill>
+                  <a:srgbClr val="22282E"/>
+                </a:solidFill>
+              </a:rPr>
+              <a:t>•  JML con SLA, una matriz RBAC con mínimo privilegio, al menos dos reglas de SoD y el plan de una</a:t>
+            </a:r>
+          </a:p>
+          <a:p>
+            <a:pPr>
+              <a:spcAft>
+                <a:spcPts val="600"/>
+              </a:spcAft>
+            </a:pPr>
+            <a:r>
+              <a:rPr sz="1500">
+                <a:solidFill>
+                  <a:srgbClr val="22282E"/>
+                </a:solidFill>
+              </a:rPr>
+              <a:t>•  campaña de recertificación trimestral.</a:t>
+            </a:r>
+          </a:p>
+          <a:p>
+            <a:pPr>
+              <a:spcAft>
+                <a:spcPts val="600"/>
+              </a:spcAft>
+            </a:pPr>
+            <a:r>
+              <a:rPr sz="1500">
+                <a:solidFill>
+                  <a:srgbClr val="22282E"/>
+                </a:solidFill>
+              </a:rPr>
+              <a:t>•  Criterio de aceptación: dado un caso — "una enfermera pasa a facturación y luego renuncia" —</a:t>
+            </a:r>
+          </a:p>
+          <a:p>
+            <a:pPr>
+              <a:spcAft>
+                <a:spcPts val="600"/>
+              </a:spcAft>
+            </a:pPr>
+            <a:r>
+              <a:rPr sz="1500">
+                <a:solidFill>
+                  <a:srgbClr val="22282E"/>
+                </a:solidFill>
+              </a:rPr>
+              <a:t>•  tu manual permite a un operador ejecutar Mover y luego Leaver indicando exactamente qué permisos</a:t>
+            </a:r>
+          </a:p>
+          <a:p>
+            <a:pPr>
+              <a:spcAft>
+                <a:spcPts val="600"/>
+              </a:spcAft>
+            </a:pPr>
+            <a:r>
+              <a:rPr sz="1500">
+                <a:solidFill>
+                  <a:srgbClr val="22282E"/>
+                </a:solidFill>
+              </a:rPr>
+              <a:t>•  se retiran, cuándo y quién lo aprueba, sin ambigüedad.</a:t>
+            </a:r>
+          </a:p>
+        </p:txBody>
+      </p:sp>
+    </p:spTree>
+  </p:cSld>
+  <p:clrMapOvr>
+    <a:masterClrMapping/>
+  </p:clrMapOvr>
+</p:sld>
+</file>
+
+<file path=ppt/slides/slide13.xml><?xml version="1.0" encoding="utf-8"?>
+<p:sld xmlns:a="http://schemas.openxmlformats.org/drawingml/2006/main" xmlns:p="http://schemas.openxmlformats.org/presentationml/2006/main" xmlns:r="http://schemas.openxmlformats.org/officeDocument/2006/relationships">
+  <p:cSld>
+    <p:spTree>
+      <p:nvGrpSpPr>
+        <p:cNvPr id="1" name=""/>
+        <p:cNvGrpSpPr/>
+        <p:nvPr/>
+      </p:nvGrpSpPr>
+      <p:grpSpPr/>
+      <p:sp>
+        <p:nvSpPr>
+          <p:cNvPr id="2" name="TextBox 1"/>
+          <p:cNvSpPr txBox="1"/>
+          <p:nvPr/>
+        </p:nvSpPr>
+        <p:spPr>
+          <a:xfrm>
+            <a:off x="457200" y="320040"/>
+            <a:ext cx="8229600" cy="822960"/>
+          </a:xfrm>
+          <a:prstGeom prst="rect">
+            <a:avLst/>
+          </a:prstGeom>
+          <a:noFill/>
+        </p:spPr>
+        <p:txBody>
+          <a:bodyPr wrap="square">
+            <a:spAutoFit/>
+          </a:bodyPr>
+          <a:lstStyle/>
+          <a:p>
+            <a:r>
+              <a:rPr sz="2600" b="1">
+                <a:solidFill>
+                  <a:srgbClr val="0B3D2E"/>
+                </a:solidFill>
+              </a:rPr>
+              <a:t>⚠️ Errores comunes</a:t>
+            </a:r>
+          </a:p>
+        </p:txBody>
+      </p:sp>
+      <p:sp>
+        <p:nvSpPr>
+          <p:cNvPr id="3" name="TextBox 2"/>
+          <p:cNvSpPr txBox="1"/>
+          <p:nvPr/>
+        </p:nvSpPr>
+        <p:spPr>
+          <a:xfrm>
+            <a:off x="457200" y="1280160"/>
+            <a:ext cx="8229600" cy="4937760"/>
+          </a:xfrm>
+          <a:prstGeom prst="rect">
+            <a:avLst/>
+          </a:prstGeom>
+          <a:noFill/>
+        </p:spPr>
+        <p:txBody>
+          <a:bodyPr wrap="square">
+            <a:spAutoFit/>
+          </a:bodyPr>
+          <a:lstStyle/>
+          <a:p>
+            <a:pPr>
+              <a:spcAft>
+                <a:spcPts val="600"/>
+              </a:spcAft>
+            </a:pPr>
+            <a:r>
+              <a:rPr sz="1500">
+                <a:solidFill>
+                  <a:srgbClr val="22282E"/>
+                </a:solidFill>
+              </a:rPr>
+              <a:t>•  La cuenta del exempleado sigue activa semanas después — Leaver no automatizado. Conecta RR. HH. como fuente y deshabilita el día de la baja.</a:t>
+            </a:r>
+          </a:p>
+          <a:p>
+            <a:pPr>
+              <a:spcAft>
+                <a:spcPts val="600"/>
+              </a:spcAft>
+            </a:pPr>
+            <a:r>
+              <a:rPr sz="1500">
+                <a:solidFill>
+                  <a:srgbClr val="22282E"/>
+                </a:solidFill>
+              </a:rPr>
+              <a:t>•  Usuarios con permisos de tres puestos anteriores — Privilege creep: Mover suma pero no resta. Retira los roles previos y recertifica.</a:t>
+            </a:r>
+          </a:p>
+          <a:p>
+            <a:pPr>
+              <a:spcAft>
+                <a:spcPts val="600"/>
+              </a:spcAft>
+            </a:pPr>
+            <a:r>
+              <a:rPr sz="1500">
+                <a:solidFill>
+                  <a:srgbClr val="22282E"/>
+                </a:solidFill>
+              </a:rPr>
+              <a:t>•  Todo el mundo es administrador "por comodidad" — Se viola mínimo privilegio. Rediseña roles y separa lo privilegiado.</a:t>
+            </a:r>
+          </a:p>
+          <a:p>
+            <a:pPr>
+              <a:spcAft>
+                <a:spcPts val="600"/>
+              </a:spcAft>
+            </a:pPr>
+            <a:r>
+              <a:rPr sz="1500">
+                <a:solidFill>
+                  <a:srgbClr val="22282E"/>
+                </a:solidFill>
+              </a:rPr>
+              <a:t>•  Cuentas de servicio sin dueño ni rotación — Quedan fuera del ciclo. Asigna propietario, rota credenciales e inclúyelas en revisiones.</a:t>
+            </a:r>
+          </a:p>
+          <a:p>
+            <a:pPr>
+              <a:spcAft>
+                <a:spcPts val="600"/>
+              </a:spcAft>
+            </a:pPr>
+            <a:r>
+              <a:rPr sz="1500">
+                <a:solidFill>
+                  <a:srgbClr val="22282E"/>
+                </a:solidFill>
+              </a:rPr>
+              <a:t>•  Recertificación que todos aprueban sin mirar — Rubber-stamping. Muestra el uso real del acceso y revoca por defecto si no hay respuesta.</a:t>
+            </a:r>
+          </a:p>
+          <a:p>
+            <a:pPr>
+              <a:spcAft>
+                <a:spcPts val="600"/>
+              </a:spcAft>
+            </a:pPr>
+            <a:r>
+              <a:rPr sz="1500">
+                <a:solidFill>
+                  <a:srgbClr val="22282E"/>
+                </a:solidFill>
+              </a:rPr>
+              <a:t>•  Cuentas compartidas de equipo — Rompen la accountability. Sustituye por cuentas individuales con roles.</a:t>
+            </a:r>
+          </a:p>
+        </p:txBody>
+      </p:sp>
+    </p:spTree>
+  </p:cSld>
+  <p:clrMapOvr>
+    <a:masterClrMapping/>
+  </p:clrMapOvr>
+</p:sld>
+</file>
+
+<file path=ppt/slides/slide14.xml><?xml version="1.0" encoding="utf-8"?>
+<p:sld xmlns:a="http://schemas.openxmlformats.org/drawingml/2006/main" xmlns:p="http://schemas.openxmlformats.org/presentationml/2006/main" xmlns:r="http://schemas.openxmlformats.org/officeDocument/2006/relationships">
+  <p:cSld>
+    <p:spTree>
+      <p:nvGrpSpPr>
+        <p:cNvPr id="1" name=""/>
+        <p:cNvGrpSpPr/>
+        <p:nvPr/>
+      </p:nvGrpSpPr>
+      <p:grpSpPr/>
+      <p:sp>
+        <p:nvSpPr>
+          <p:cNvPr id="2" name="TextBox 1"/>
+          <p:cNvSpPr txBox="1"/>
+          <p:nvPr/>
+        </p:nvSpPr>
+        <p:spPr>
+          <a:xfrm>
+            <a:off x="457200" y="320040"/>
+            <a:ext cx="8229600" cy="822960"/>
+          </a:xfrm>
+          <a:prstGeom prst="rect">
+            <a:avLst/>
+          </a:prstGeom>
+          <a:noFill/>
+        </p:spPr>
+        <p:txBody>
+          <a:bodyPr wrap="square">
+            <a:spAutoFit/>
+          </a:bodyPr>
+          <a:lstStyle/>
+          <a:p>
+            <a:r>
+              <a:rPr sz="2600" b="1">
+                <a:solidFill>
+                  <a:srgbClr val="0B3D2E"/>
+                </a:solidFill>
+              </a:rPr>
+              <a:t>❓ Preguntas frecuentes</a:t>
+            </a:r>
+          </a:p>
+        </p:txBody>
+      </p:sp>
+      <p:sp>
+        <p:nvSpPr>
+          <p:cNvPr id="3" name="TextBox 2"/>
+          <p:cNvSpPr txBox="1"/>
+          <p:nvPr/>
+        </p:nvSpPr>
+        <p:spPr>
+          <a:xfrm>
+            <a:off x="457200" y="1280160"/>
+            <a:ext cx="8229600" cy="4937760"/>
+          </a:xfrm>
+          <a:prstGeom prst="rect">
+            <a:avLst/>
+          </a:prstGeom>
+          <a:noFill/>
+        </p:spPr>
+        <p:txBody>
+          <a:bodyPr wrap="square">
+            <a:spAutoFit/>
+          </a:bodyPr>
+          <a:lstStyle/>
+          <a:p>
+            <a:pPr>
+              <a:spcAft>
+                <a:spcPts val="600"/>
+              </a:spcAft>
+            </a:pPr>
+            <a:r>
+              <a:rPr sz="1500">
+                <a:solidFill>
+                  <a:srgbClr val="22282E"/>
+                </a:solidFill>
+              </a:rPr>
+              <a:t>•  ❓ ¿RBAC o ABAC?</a:t>
+            </a:r>
+          </a:p>
+          <a:p>
+            <a:pPr>
+              <a:spcAft>
+                <a:spcPts val="600"/>
+              </a:spcAft>
+            </a:pPr>
+            <a:r>
+              <a:rPr sz="1500">
+                <a:solidFill>
+                  <a:srgbClr val="22282E"/>
+                </a:solidFill>
+              </a:rPr>
+              <a:t>•  No es excluyente. RBAC es simple, auditable y escala para la mayoría de casos; ABAC añade</a:t>
+            </a:r>
+          </a:p>
+          <a:p>
+            <a:pPr>
+              <a:spcAft>
+                <a:spcPts val="600"/>
+              </a:spcAft>
+            </a:pPr>
+            <a:r>
+              <a:rPr sz="1500">
+                <a:solidFill>
+                  <a:srgbClr val="22282E"/>
+                </a:solidFill>
+              </a:rPr>
+              <a:t>•  granularidad y contexto (hora, ubicación, sensibilidad). Muchas organizaciones combinan roles</a:t>
+            </a:r>
+          </a:p>
+          <a:p>
+            <a:pPr>
+              <a:spcAft>
+                <a:spcPts val="600"/>
+              </a:spcAft>
+            </a:pPr>
+            <a:r>
+              <a:rPr sz="1500">
+                <a:solidFill>
+                  <a:srgbClr val="22282E"/>
+                </a:solidFill>
+              </a:rPr>
+              <a:t>•  como base y atributos para políticas finas.</a:t>
+            </a:r>
+          </a:p>
+          <a:p>
+            <a:pPr>
+              <a:spcAft>
+                <a:spcPts val="600"/>
+              </a:spcAft>
+            </a:pPr>
+            <a:r>
+              <a:rPr sz="1500">
+                <a:solidFill>
+                  <a:srgbClr val="22282E"/>
+                </a:solidFill>
+              </a:rPr>
+              <a:t>•  ❓ ¿Por qué deshabilitar y no borrar la cuenta al dar de baja?</a:t>
+            </a:r>
+          </a:p>
+          <a:p>
+            <a:pPr>
+              <a:spcAft>
+                <a:spcPts val="600"/>
+              </a:spcAft>
+            </a:pPr>
+            <a:r>
+              <a:rPr sz="1500">
+                <a:solidFill>
+                  <a:srgbClr val="22282E"/>
+                </a:solidFill>
+              </a:rPr>
+              <a:t>•  Para preservar la trazabilidad, cumplir retención de logs y permitir investigaciones. Se borra</a:t>
+            </a:r>
+          </a:p>
+          <a:p>
+            <a:pPr>
+              <a:spcAft>
+                <a:spcPts val="600"/>
+              </a:spcAft>
+            </a:pPr>
+            <a:r>
+              <a:rPr sz="1500">
+                <a:solidFill>
+                  <a:srgbClr val="22282E"/>
+                </a:solidFill>
+              </a:rPr>
+              <a:t>•  después, según la política de retención, tras transferir la propiedad de datos.</a:t>
+            </a:r>
+          </a:p>
+        </p:txBody>
+      </p:sp>
+    </p:spTree>
+  </p:cSld>
+  <p:clrMapOvr>
+    <a:masterClrMapping/>
+  </p:clrMapOvr>
+</p:sld>
+</file>
+
+<file path=ppt/slides/slide15.xml><?xml version="1.0" encoding="utf-8"?>
+<p:sld xmlns:a="http://schemas.openxmlformats.org/drawingml/2006/main" xmlns:p="http://schemas.openxmlformats.org/presentationml/2006/main" xmlns:r="http://schemas.openxmlformats.org/officeDocument/2006/relationships">
+  <p:cSld>
+    <p:spTree>
+      <p:nvGrpSpPr>
+        <p:cNvPr id="1" name=""/>
+        <p:cNvGrpSpPr/>
+        <p:nvPr/>
+      </p:nvGrpSpPr>
+      <p:grpSpPr/>
+      <p:sp>
+        <p:nvSpPr>
+          <p:cNvPr id="2" name="TextBox 1"/>
+          <p:cNvSpPr txBox="1"/>
+          <p:nvPr/>
+        </p:nvSpPr>
+        <p:spPr>
+          <a:xfrm>
+            <a:off x="457200" y="320040"/>
+            <a:ext cx="8229600" cy="822960"/>
+          </a:xfrm>
+          <a:prstGeom prst="rect">
+            <a:avLst/>
+          </a:prstGeom>
+          <a:noFill/>
+        </p:spPr>
+        <p:txBody>
+          <a:bodyPr wrap="square">
+            <a:spAutoFit/>
+          </a:bodyPr>
+          <a:lstStyle/>
+          <a:p>
+            <a:r>
+              <a:rPr sz="2600" b="1">
+                <a:solidFill>
+                  <a:srgbClr val="0B3D2E"/>
+                </a:solidFill>
+              </a:rPr>
+              <a:t>🔗 Referencias</a:t>
+            </a:r>
+          </a:p>
+        </p:txBody>
+      </p:sp>
+      <p:sp>
+        <p:nvSpPr>
+          <p:cNvPr id="3" name="TextBox 2"/>
+          <p:cNvSpPr txBox="1"/>
+          <p:nvPr/>
+        </p:nvSpPr>
+        <p:spPr>
+          <a:xfrm>
+            <a:off x="457200" y="1280160"/>
+            <a:ext cx="8229600" cy="4937760"/>
+          </a:xfrm>
+          <a:prstGeom prst="rect">
+            <a:avLst/>
+          </a:prstGeom>
+          <a:noFill/>
+        </p:spPr>
+        <p:txBody>
+          <a:bodyPr wrap="square">
+            <a:spAutoFit/>
+          </a:bodyPr>
+          <a:lstStyle/>
+          <a:p>
+            <a:pPr>
+              <a:spcAft>
+                <a:spcPts val="600"/>
+              </a:spcAft>
+            </a:pPr>
+            <a:r>
+              <a:rPr sz="1500">
+                <a:solidFill>
+                  <a:srgbClr val="22282E"/>
+                </a:solidFill>
+              </a:rPr>
               <a:t>•  (ISC)² — CISSP Official Study Guide, 9.ª ed., Dominio 5 Identity and Access Management.</a:t>
             </a:r>
           </a:p>
@@ -3644,6 +4155,81 @@
           </a:p>
         </p:txBody>
       </p:sp>
+    </p:spTree>
+  </p:cSld>
+  <p:clrMapOvr>
+    <a:masterClrMapping/>
+  </p:clrMapOvr>
+</p:sld>
+</file>
+
+<file path=ppt/slides/slide16.xml><?xml version="1.0" encoding="utf-8"?>
+<p:sld xmlns:a="http://schemas.openxmlformats.org/drawingml/2006/main" xmlns:p="http://schemas.openxmlformats.org/presentationml/2006/main" xmlns:r="http://schemas.openxmlformats.org/officeDocument/2006/relationships">
+  <p:cSld>
+    <p:spTree>
+      <p:nvGrpSpPr>
+        <p:cNvPr id="1" name=""/>
+        <p:cNvGrpSpPr/>
+        <p:nvPr/>
+      </p:nvGrpSpPr>
+      <p:grpSpPr/>
+      <p:sp>
+        <p:nvSpPr>
+          <p:cNvPr id="2" name="TextBox 1"/>
+          <p:cNvSpPr txBox="1"/>
+          <p:nvPr/>
+        </p:nvSpPr>
+        <p:spPr>
+          <a:xfrm>
+            <a:off x="457200" y="274320"/>
+            <a:ext cx="8229600" cy="640080"/>
+          </a:xfrm>
+          <a:prstGeom prst="rect">
+            <a:avLst/>
+          </a:prstGeom>
+          <a:noFill/>
+        </p:spPr>
+        <p:txBody>
+          <a:bodyPr wrap="square">
+            <a:spAutoFit/>
+          </a:bodyPr>
+          <a:lstStyle/>
+          <a:p>
+            <a:r>
+              <a:rPr sz="2200" b="1">
+                <a:solidFill>
+                  <a:srgbClr val="0B3D2E"/>
+                </a:solidFill>
+              </a:rPr>
+              <a:t>Diagrama de la clase</a:t>
+            </a:r>
+          </a:p>
+        </p:txBody>
+      </p:sp>
+      <p:pic>
+        <p:nvPicPr>
+          <p:cNvPr id="3" name="Picture 2" descr="766afe2724c3b1af.png"/>
+          <p:cNvPicPr>
+            <a:picLocks noChangeAspect="1"/>
+          </p:cNvPicPr>
+          <p:nvPr/>
+        </p:nvPicPr>
+        <p:blipFill>
+          <a:blip r:embed="rId2"/>
+          <a:stretch>
+            <a:fillRect/>
+          </a:stretch>
+        </p:blipFill>
+        <p:spPr>
+          <a:xfrm>
+            <a:off x="457200" y="3291840"/>
+            <a:ext cx="8229600" cy="914400"/>
+          </a:xfrm>
+          <a:prstGeom prst="rect">
+            <a:avLst/>
+          </a:prstGeom>
+        </p:spPr>
+      </p:pic>
     </p:spTree>
   </p:cSld>
   <p:clrMapOvr>
@@ -4197,7 +4783,7 @@
                   <a:srgbClr val="0B3D2E"/>
                 </a:solidFill>
               </a:rPr>
-              <a:t>📖 Definiciones y características</a:t>
+              <a:t>🧠 Modelo mental y caso de decisión</a:t>
             </a:r>
           </a:p>
         </p:txBody>
@@ -4235,97 +4821,22 @@
                   <a:srgbClr val="22282E"/>
                 </a:solidFill>
               </a:rPr>
-              <a:t>•  Identidad: representación digital única de un usuario, dispositivo o servicio dentro del</a:t>
-            </a:r>
-          </a:p>
-          <a:p>
-            <a:pPr>
-              <a:spcAft>
-                <a:spcPts val="600"/>
-              </a:spcAft>
-            </a:pPr>
-            <a:r>
-              <a:rPr sz="1500">
-                <a:solidFill>
-                  <a:srgbClr val="22282E"/>
-                </a:solidFill>
-              </a:rPr>
-              <a:t>•  sistema. Característica: debe ser única e inequívoca (no cuentas compartidas).</a:t>
-            </a:r>
-          </a:p>
-          <a:p>
-            <a:pPr>
-              <a:spcAft>
-                <a:spcPts val="600"/>
-              </a:spcAft>
-            </a:pPr>
-            <a:r>
-              <a:rPr sz="1500">
-                <a:solidFill>
-                  <a:srgbClr val="22282E"/>
-                </a:solidFill>
-              </a:rPr>
-              <a:t>•  IAAA: Identificación (declarar quién eres), Autenticación (probarlo), Autorización (qué</a:t>
-            </a:r>
-          </a:p>
-          <a:p>
-            <a:pPr>
-              <a:spcAft>
-                <a:spcPts val="600"/>
-              </a:spcAft>
-            </a:pPr>
-            <a:r>
-              <a:rPr sz="1500">
-                <a:solidFill>
-                  <a:srgbClr val="22282E"/>
-                </a:solidFill>
-              </a:rPr>
-              <a:t>•  puedes hacer) y Accountability (registro de lo que hiciste). Marco base del dominio.</a:t>
-            </a:r>
-          </a:p>
-          <a:p>
-            <a:pPr>
-              <a:spcAft>
-                <a:spcPts val="600"/>
-              </a:spcAft>
-            </a:pPr>
-            <a:r>
-              <a:rPr sz="1500">
-                <a:solidFill>
-                  <a:srgbClr val="22282E"/>
-                </a:solidFill>
-              </a:rPr>
-              <a:t>•  JML (Joiner-Mover-Leaver): modelo del ciclo laboral — alta al ingresar, ajuste al cambiar</a:t>
-            </a:r>
-          </a:p>
-          <a:p>
-            <a:pPr>
-              <a:spcAft>
-                <a:spcPts val="600"/>
-              </a:spcAft>
-            </a:pPr>
-            <a:r>
-              <a:rPr sz="1500">
-                <a:solidFill>
-                  <a:srgbClr val="22282E"/>
-                </a:solidFill>
-              </a:rPr>
-              <a:t>•  de rol y baja al salir. Característica: cada evento debe disparar un cambio de acceso.</a:t>
-            </a:r>
-          </a:p>
-          <a:p>
-            <a:pPr>
-              <a:spcAft>
-                <a:spcPts val="600"/>
-              </a:spcAft>
-            </a:pPr>
-            <a:r>
-              <a:rPr sz="1500">
-                <a:solidFill>
-                  <a:srgbClr val="22282E"/>
-                </a:solidFill>
-              </a:rPr>
-              <a:t>•  RBAC: control de acceso basado en roles; los permisos se asignan a roles y los roles a</a:t>
+              <a:t>•  IAM enlaza evento laboral, identidad, cuentas, derechos, revisión y baja; crear una cuenta no demuestra acceso correcto.</a:t>
+            </a:r>
+          </a:p>
+          <a:p>
+            <a:pPr>
+              <a:spcAft>
+                <a:spcPts val="600"/>
+              </a:spcAft>
+            </a:pPr>
+            <a:r>
+              <a:rPr sz="1500">
+                <a:solidFill>
+                  <a:srgbClr val="22282E"/>
+                </a:solidFill>
+              </a:rPr>
+              <a:t>•  Caso razonado. Un traslado conserva privilegios previos. La revisión por evento detecta acumulación antes del ciclo anual.</a:t>
             </a:r>
           </a:p>
         </p:txBody>
@@ -4376,7 +4887,7 @@
                   <a:srgbClr val="0B3D2E"/>
                 </a:solidFill>
               </a:rPr>
-              <a:t>🧰 Herramientas y preparación</a:t>
+              <a:t>📔 Glosario operativo complementario</a:t>
             </a:r>
           </a:p>
         </p:txBody>
@@ -4414,97 +4925,52 @@
                   <a:srgbClr val="22282E"/>
                 </a:solidFill>
               </a:rPr>
-              <a:t>•  Clase de gobierno con laboratorio de diseño. Prepara:</a:t>
-            </a:r>
-          </a:p>
-          <a:p>
-            <a:pPr>
-              <a:spcAft>
-                <a:spcPts val="600"/>
-              </a:spcAft>
-            </a:pPr>
-            <a:r>
-              <a:rPr sz="1500">
-                <a:solidFill>
-                  <a:srgbClr val="22282E"/>
-                </a:solidFill>
-              </a:rPr>
-              <a:t>•  Hoja de cálculo para la matriz de roles y el registro de recertificación.</a:t>
-            </a:r>
-          </a:p>
-          <a:p>
-            <a:pPr>
-              <a:spcAft>
-                <a:spcPts val="600"/>
-              </a:spcAft>
-            </a:pPr>
-            <a:r>
-              <a:rPr sz="1500">
-                <a:solidFill>
-                  <a:srgbClr val="22282E"/>
-                </a:solidFill>
-              </a:rPr>
-              <a:t>•  Un directorio de referencia para ilustrar conceptos: Active Directory / Microsoft Entra ID,</a:t>
-            </a:r>
-          </a:p>
-          <a:p>
-            <a:pPr>
-              <a:spcAft>
-                <a:spcPts val="600"/>
-              </a:spcAft>
-            </a:pPr>
-            <a:r>
-              <a:rPr sz="1500">
-                <a:solidFill>
-                  <a:srgbClr val="22282E"/>
-                </a:solidFill>
-              </a:rPr>
-              <a:t>•  o el open source Keycloak, para ver grupos, roles y aprovisionamiento.</a:t>
-            </a:r>
-          </a:p>
-          <a:p>
-            <a:pPr>
-              <a:spcAft>
-                <a:spcPts val="600"/>
-              </a:spcAft>
-            </a:pPr>
-            <a:r>
-              <a:rPr sz="1500">
-                <a:solidFill>
-                  <a:srgbClr val="22282E"/>
-                </a:solidFill>
-              </a:rPr>
-              <a:t>•  El estándar SCIM 2.0 (RFC 7643/7644) como referencia del aprovisionamiento automatizado.</a:t>
-            </a:r>
-          </a:p>
-          <a:p>
-            <a:pPr>
-              <a:spcAft>
-                <a:spcPts val="600"/>
-              </a:spcAft>
-            </a:pPr>
-            <a:r>
-              <a:rPr sz="1500">
-                <a:solidFill>
-                  <a:srgbClr val="22282E"/>
-                </a:solidFill>
-              </a:rPr>
-              <a:t>•  Opcional: una plataforma IGA de referencia (SailPoint, Saviynt, Microsoft Entra ID Governance)</a:t>
-            </a:r>
-          </a:p>
-          <a:p>
-            <a:pPr>
-              <a:spcAft>
-                <a:spcPts val="600"/>
-              </a:spcAft>
-            </a:pPr>
-            <a:r>
-              <a:rPr sz="1500">
-                <a:solidFill>
-                  <a:srgbClr val="22282E"/>
-                </a:solidFill>
-              </a:rPr>
-              <a:t>•  para entender campañas de acceso; basta con el concepto para el ejercicio.</a:t>
+              <a:t>•  Término — Definición</a:t>
+            </a:r>
+          </a:p>
+          <a:p>
+            <a:pPr>
+              <a:spcAft>
+                <a:spcPts val="600"/>
+              </a:spcAft>
+            </a:pPr>
+            <a:r>
+              <a:rPr sz="1500">
+                <a:solidFill>
+                  <a:srgbClr val="22282E"/>
+                </a:solidFill>
+              </a:rPr>
+              <a:t>•  Evidencia — Información cuya procedencia y relación con un criterio pueden revisarse.</a:t>
+            </a:r>
+          </a:p>
+          <a:p>
+            <a:pPr>
+              <a:spcAft>
+                <a:spcPts val="600"/>
+              </a:spcAft>
+            </a:pPr>
+            <a:r>
+              <a:rPr sz="1500">
+                <a:solidFill>
+                  <a:srgbClr val="22282E"/>
+                </a:solidFill>
+              </a:rPr>
+              <a:t>•  Supuesto — Condición declarada de la que depende una conclusión.</a:t>
+            </a:r>
+          </a:p>
+          <a:p>
+            <a:pPr>
+              <a:spcAft>
+                <a:spcPts val="600"/>
+              </a:spcAft>
+            </a:pPr>
+            <a:r>
+              <a:rPr sz="1500">
+                <a:solidFill>
+                  <a:srgbClr val="22282E"/>
+                </a:solidFill>
+              </a:rPr>
+              <a:t>•  Riesgo residual — Exposición que permanece después del tratamiento.</a:t>
             </a:r>
           </a:p>
         </p:txBody>
@@ -4555,7 +5021,7 @@
                   <a:srgbClr val="0B3D2E"/>
                 </a:solidFill>
               </a:rPr>
-              <a:t>🧪 Laboratorio guiado — Diseñar el ciclo de vida y una matriz RBAC</a:t>
+              <a:t>✅ Criterio de dominio</a:t>
             </a:r>
           </a:p>
         </p:txBody>
@@ -4593,97 +5059,7 @@
                   <a:srgbClr val="22282E"/>
                 </a:solidFill>
               </a:rPr>
-              <a:t>•  Sobre la empresa "NovaSalud" de clases anteriores.</a:t>
-            </a:r>
-          </a:p>
-          <a:p>
-            <a:pPr>
-              <a:spcAft>
-                <a:spcPts val="600"/>
-              </a:spcAft>
-            </a:pPr>
-            <a:r>
-              <a:rPr sz="1500">
-                <a:solidFill>
-                  <a:srgbClr val="22282E"/>
-                </a:solidFill>
-              </a:rPr>
-              <a:t>•  Fuente autoritativa. Declara a RR. HH. como origen de verdad de la identidad: alta, cambio</a:t>
-            </a:r>
-          </a:p>
-          <a:p>
-            <a:pPr>
-              <a:spcAft>
-                <a:spcPts val="600"/>
-              </a:spcAft>
-            </a:pPr>
-            <a:r>
-              <a:rPr sz="1500">
-                <a:solidFill>
-                  <a:srgbClr val="22282E"/>
-                </a:solidFill>
-              </a:rPr>
-              <a:t>•  y baja se originan allí y se propagan a los sistemas (idealmente vía SCIM).</a:t>
-            </a:r>
-          </a:p>
-          <a:p>
-            <a:pPr>
-              <a:spcAft>
-                <a:spcPts val="600"/>
-              </a:spcAft>
-            </a:pPr>
-            <a:r>
-              <a:rPr sz="1500">
-                <a:solidFill>
-                  <a:srgbClr val="22282E"/>
-                </a:solidFill>
-              </a:rPr>
-              <a:t>•  Flujo Joiner. Diagrama el alta: RR. HH. crea el registro → se genera la cuenta → se asignan</a:t>
-            </a:r>
-          </a:p>
-          <a:p>
-            <a:pPr>
-              <a:spcAft>
-                <a:spcPts val="600"/>
-              </a:spcAft>
-            </a:pPr>
-            <a:r>
-              <a:rPr sz="1500">
-                <a:solidFill>
-                  <a:srgbClr val="22282E"/>
-                </a:solidFill>
-              </a:rPr>
-              <a:t>•  roles por puesto → se habilita MFA → se notifica al usuario. Define el SLA (p. ej. listo el día 1).</a:t>
-            </a:r>
-          </a:p>
-          <a:p>
-            <a:pPr>
-              <a:spcAft>
-                <a:spcPts val="600"/>
-              </a:spcAft>
-            </a:pPr>
-            <a:r>
-              <a:rPr sz="1500">
-                <a:solidFill>
-                  <a:srgbClr val="22282E"/>
-                </a:solidFill>
-              </a:rPr>
-              <a:t>•  Flujo Mover. Diseña el cambio de rol: al cambiar de puesto se retiran los permisos del</a:t>
-            </a:r>
-          </a:p>
-          <a:p>
-            <a:pPr>
-              <a:spcAft>
-                <a:spcPts val="600"/>
-              </a:spcAft>
-            </a:pPr>
-            <a:r>
-              <a:rPr sz="1500">
-                <a:solidFill>
-                  <a:srgbClr val="22282E"/>
-                </a:solidFill>
-              </a:rPr>
-              <a:t>•  rol anterior y se asignan los del nuevo. Evita el patrón "sumar sin restar" (privilege creep).</a:t>
+              <a:t>•  El alumno demuestra dominio cuando explica el diagrama, resuelve el caso con evidencia, declara límites y puede defender por qué su decisión cambia si cambia un supuesto.</a:t>
             </a:r>
           </a:p>
         </p:txBody>
@@ -4734,7 +5110,7 @@
                   <a:srgbClr val="0B3D2E"/>
                 </a:solidFill>
               </a:rPr>
-              <a:t>✍️ Ejercicios</a:t>
+              <a:t>📖 Definiciones y características</a:t>
             </a:r>
           </a:p>
         </p:txBody>
@@ -4772,82 +5148,97 @@
                   <a:srgbClr val="22282E"/>
                 </a:solidFill>
               </a:rPr>
-              <a:t>•  Dibuja el ciclo de vida completo de la identidad con los disparadores de cada transición.</a:t>
-            </a:r>
-          </a:p>
-          <a:p>
-            <a:pPr>
-              <a:spcAft>
-                <a:spcPts val="600"/>
-              </a:spcAft>
-            </a:pPr>
-            <a:r>
-              <a:rPr sz="1500">
-                <a:solidFill>
-                  <a:srgbClr val="22282E"/>
-                </a:solidFill>
-              </a:rPr>
-              <a:t>•  Explica con un ejemplo la diferencia entre autenticación y autorización.</a:t>
-            </a:r>
-          </a:p>
-          <a:p>
-            <a:pPr>
-              <a:spcAft>
-                <a:spcPts val="600"/>
-              </a:spcAft>
-            </a:pPr>
-            <a:r>
-              <a:rPr sz="1500">
-                <a:solidFill>
-                  <a:srgbClr val="22282E"/>
-                </a:solidFill>
-              </a:rPr>
-              <a:t>•  Convierte una lista de accesos individuales desordenados en un modelo RBAC de 4 roles.</a:t>
-            </a:r>
-          </a:p>
-          <a:p>
-            <a:pPr>
-              <a:spcAft>
-                <a:spcPts val="600"/>
-              </a:spcAft>
-            </a:pPr>
-            <a:r>
-              <a:rPr sz="1500">
-                <a:solidFill>
-                  <a:srgbClr val="22282E"/>
-                </a:solidFill>
-              </a:rPr>
-              <a:t>•  Define 3 reglas de separación de funciones para un proceso de compras.</a:t>
-            </a:r>
-          </a:p>
-          <a:p>
-            <a:pPr>
-              <a:spcAft>
-                <a:spcPts val="600"/>
-              </a:spcAft>
-            </a:pPr>
-            <a:r>
-              <a:rPr sz="1500">
-                <a:solidFill>
-                  <a:srgbClr val="22282E"/>
-                </a:solidFill>
-              </a:rPr>
-              <a:t>•  Diseña el flujo Leaver para un despido inmediato: ¿qué se hace en los primeros 15 minutos?</a:t>
-            </a:r>
-          </a:p>
-          <a:p>
-            <a:pPr>
-              <a:spcAft>
-                <a:spcPts val="600"/>
-              </a:spcAft>
-            </a:pPr>
-            <a:r>
-              <a:rPr sz="1500">
-                <a:solidFill>
-                  <a:srgbClr val="22282E"/>
-                </a:solidFill>
-              </a:rPr>
-              <a:t>•  Propón una regla ABAC que RBAC no pueda expresar bien (p. ej. acceso solo en horario laboral y desde red corporativa).</a:t>
+              <a:t>•  Identidad: representación digital única de un usuario, dispositivo o servicio dentro del</a:t>
+            </a:r>
+          </a:p>
+          <a:p>
+            <a:pPr>
+              <a:spcAft>
+                <a:spcPts val="600"/>
+              </a:spcAft>
+            </a:pPr>
+            <a:r>
+              <a:rPr sz="1500">
+                <a:solidFill>
+                  <a:srgbClr val="22282E"/>
+                </a:solidFill>
+              </a:rPr>
+              <a:t>•  sistema. Característica: debe ser única e inequívoca (no cuentas compartidas).</a:t>
+            </a:r>
+          </a:p>
+          <a:p>
+            <a:pPr>
+              <a:spcAft>
+                <a:spcPts val="600"/>
+              </a:spcAft>
+            </a:pPr>
+            <a:r>
+              <a:rPr sz="1500">
+                <a:solidFill>
+                  <a:srgbClr val="22282E"/>
+                </a:solidFill>
+              </a:rPr>
+              <a:t>•  IAAA: Identificación (declarar quién eres), Autenticación (probarlo), Autorización (qué</a:t>
+            </a:r>
+          </a:p>
+          <a:p>
+            <a:pPr>
+              <a:spcAft>
+                <a:spcPts val="600"/>
+              </a:spcAft>
+            </a:pPr>
+            <a:r>
+              <a:rPr sz="1500">
+                <a:solidFill>
+                  <a:srgbClr val="22282E"/>
+                </a:solidFill>
+              </a:rPr>
+              <a:t>•  puedes hacer) y Accountability (registro de lo que hiciste). Marco base del dominio.</a:t>
+            </a:r>
+          </a:p>
+          <a:p>
+            <a:pPr>
+              <a:spcAft>
+                <a:spcPts val="600"/>
+              </a:spcAft>
+            </a:pPr>
+            <a:r>
+              <a:rPr sz="1500">
+                <a:solidFill>
+                  <a:srgbClr val="22282E"/>
+                </a:solidFill>
+              </a:rPr>
+              <a:t>•  JML (Joiner-Mover-Leaver): modelo del ciclo laboral — alta al ingresar, ajuste al cambiar</a:t>
+            </a:r>
+          </a:p>
+          <a:p>
+            <a:pPr>
+              <a:spcAft>
+                <a:spcPts val="600"/>
+              </a:spcAft>
+            </a:pPr>
+            <a:r>
+              <a:rPr sz="1500">
+                <a:solidFill>
+                  <a:srgbClr val="22282E"/>
+                </a:solidFill>
+              </a:rPr>
+              <a:t>•  de rol y baja al salir. Característica: cada evento debe disparar un cambio de acceso.</a:t>
+            </a:r>
+          </a:p>
+          <a:p>
+            <a:pPr>
+              <a:spcAft>
+                <a:spcPts val="600"/>
+              </a:spcAft>
+            </a:pPr>
+            <a:r>
+              <a:rPr sz="1500">
+                <a:solidFill>
+                  <a:srgbClr val="22282E"/>
+                </a:solidFill>
+              </a:rPr>
+              <a:t>•  RBAC: control de acceso basado en roles; los permisos se asignan a roles y los roles a</a:t>
             </a:r>
           </a:p>
         </p:txBody>
@@ -4898,7 +5289,7 @@
                   <a:srgbClr val="0B3D2E"/>
                 </a:solidFill>
               </a:rPr>
-              <a:t>📝 Reto verificable</a:t>
+              <a:t>🧰 Herramientas y preparación</a:t>
             </a:r>
           </a:p>
         </p:txBody>
@@ -4936,82 +5327,97 @@
                   <a:srgbClr val="22282E"/>
                 </a:solidFill>
               </a:rPr>
-              <a:t>•  Entrega un Manual de Gestión del Ciclo de Vida de Identidades que contenga: los tres flujos</a:t>
-            </a:r>
-          </a:p>
-          <a:p>
-            <a:pPr>
-              <a:spcAft>
-                <a:spcPts val="600"/>
-              </a:spcAft>
-            </a:pPr>
-            <a:r>
-              <a:rPr sz="1500">
-                <a:solidFill>
-                  <a:srgbClr val="22282E"/>
-                </a:solidFill>
-              </a:rPr>
-              <a:t>•  JML con SLA, una matriz RBAC con mínimo privilegio, al menos dos reglas de SoD y el plan de una</a:t>
-            </a:r>
-          </a:p>
-          <a:p>
-            <a:pPr>
-              <a:spcAft>
-                <a:spcPts val="600"/>
-              </a:spcAft>
-            </a:pPr>
-            <a:r>
-              <a:rPr sz="1500">
-                <a:solidFill>
-                  <a:srgbClr val="22282E"/>
-                </a:solidFill>
-              </a:rPr>
-              <a:t>•  campaña de recertificación trimestral.</a:t>
-            </a:r>
-          </a:p>
-          <a:p>
-            <a:pPr>
-              <a:spcAft>
-                <a:spcPts val="600"/>
-              </a:spcAft>
-            </a:pPr>
-            <a:r>
-              <a:rPr sz="1500">
-                <a:solidFill>
-                  <a:srgbClr val="22282E"/>
-                </a:solidFill>
-              </a:rPr>
-              <a:t>•  Criterio de aceptación: dado un caso — "una enfermera pasa a facturación y luego renuncia" —</a:t>
-            </a:r>
-          </a:p>
-          <a:p>
-            <a:pPr>
-              <a:spcAft>
-                <a:spcPts val="600"/>
-              </a:spcAft>
-            </a:pPr>
-            <a:r>
-              <a:rPr sz="1500">
-                <a:solidFill>
-                  <a:srgbClr val="22282E"/>
-                </a:solidFill>
-              </a:rPr>
-              <a:t>•  tu manual permite a un operador ejecutar Mover y luego Leaver indicando exactamente qué permisos</a:t>
-            </a:r>
-          </a:p>
-          <a:p>
-            <a:pPr>
-              <a:spcAft>
-                <a:spcPts val="600"/>
-              </a:spcAft>
-            </a:pPr>
-            <a:r>
-              <a:rPr sz="1500">
-                <a:solidFill>
-                  <a:srgbClr val="22282E"/>
-                </a:solidFill>
-              </a:rPr>
-              <a:t>•  se retiran, cuándo y quién lo aprueba, sin ambigüedad.</a:t>
+              <a:t>•  Clase de gobierno con laboratorio de diseño. Prepara:</a:t>
+            </a:r>
+          </a:p>
+          <a:p>
+            <a:pPr>
+              <a:spcAft>
+                <a:spcPts val="600"/>
+              </a:spcAft>
+            </a:pPr>
+            <a:r>
+              <a:rPr sz="1500">
+                <a:solidFill>
+                  <a:srgbClr val="22282E"/>
+                </a:solidFill>
+              </a:rPr>
+              <a:t>•  Hoja de cálculo para la matriz de roles y el registro de recertificación.</a:t>
+            </a:r>
+          </a:p>
+          <a:p>
+            <a:pPr>
+              <a:spcAft>
+                <a:spcPts val="600"/>
+              </a:spcAft>
+            </a:pPr>
+            <a:r>
+              <a:rPr sz="1500">
+                <a:solidFill>
+                  <a:srgbClr val="22282E"/>
+                </a:solidFill>
+              </a:rPr>
+              <a:t>•  Un directorio de referencia para ilustrar conceptos: Active Directory / Microsoft Entra ID,</a:t>
+            </a:r>
+          </a:p>
+          <a:p>
+            <a:pPr>
+              <a:spcAft>
+                <a:spcPts val="600"/>
+              </a:spcAft>
+            </a:pPr>
+            <a:r>
+              <a:rPr sz="1500">
+                <a:solidFill>
+                  <a:srgbClr val="22282E"/>
+                </a:solidFill>
+              </a:rPr>
+              <a:t>•  o el open source Keycloak, para ver grupos, roles y aprovisionamiento.</a:t>
+            </a:r>
+          </a:p>
+          <a:p>
+            <a:pPr>
+              <a:spcAft>
+                <a:spcPts val="600"/>
+              </a:spcAft>
+            </a:pPr>
+            <a:r>
+              <a:rPr sz="1500">
+                <a:solidFill>
+                  <a:srgbClr val="22282E"/>
+                </a:solidFill>
+              </a:rPr>
+              <a:t>•  El estándar SCIM 2.0 (RFC 7643/7644) como referencia del aprovisionamiento automatizado.</a:t>
+            </a:r>
+          </a:p>
+          <a:p>
+            <a:pPr>
+              <a:spcAft>
+                <a:spcPts val="600"/>
+              </a:spcAft>
+            </a:pPr>
+            <a:r>
+              <a:rPr sz="1500">
+                <a:solidFill>
+                  <a:srgbClr val="22282E"/>
+                </a:solidFill>
+              </a:rPr>
+              <a:t>•  Opcional: una plataforma IGA de referencia (SailPoint, Saviynt, Microsoft Entra ID Governance)</a:t>
+            </a:r>
+          </a:p>
+          <a:p>
+            <a:pPr>
+              <a:spcAft>
+                <a:spcPts val="600"/>
+              </a:spcAft>
+            </a:pPr>
+            <a:r>
+              <a:rPr sz="1500">
+                <a:solidFill>
+                  <a:srgbClr val="22282E"/>
+                </a:solidFill>
+              </a:rPr>
+              <a:t>•  para entender campañas de acceso; basta con el concepto para el ejercicio.</a:t>
             </a:r>
           </a:p>
         </p:txBody>
